--- a/week-04/Capstone_1/Jim_Beam_5min.pptx
+++ b/week-04/Capstone_1/Jim_Beam_5min.pptx
@@ -122,6 +122,8 @@
 <file path=ppt/revisionInfo.xml><?xml version="1.0" encoding="utf-8"?>
 <p1510:revInfo xmlns:a="http://schemas.openxmlformats.org/drawingml/2006/main" xmlns:r="http://schemas.openxmlformats.org/officeDocument/2006/relationships" xmlns:p1510="http://schemas.microsoft.com/office/powerpoint/2015/10/main">
   <p1510:revLst>
+    <p1510:client id="{24C6B49C-0DF2-AD68-7E52-A735D35FF8AD}" v="46" dt="2026-04-30T23:58:42.080"/>
+    <p1510:client id="{D7070056-2883-7A2A-92E5-C1BB82E89651}" v="19" dt="2026-04-30T16:44:21.548"/>
     <p1510:client id="{F5547684-77FA-BCFE-9AE9-CC206A12FDD5}" v="231" dt="2026-04-30T01:56:10.224"/>
     <p1510:client id="{F6F978E9-4D2D-6399-2BA3-250CC7A26656}" v="70" dt="2026-04-30T04:12:54.330"/>
   </p1510:revLst>
@@ -130,6 +132,126 @@
 
 <file path=ppt/changesInfos/changesInfo1.xml><?xml version="1.0" encoding="utf-8"?>
 <pc:chgInfo xmlns:a="http://schemas.openxmlformats.org/drawingml/2006/main" xmlns:r="http://schemas.openxmlformats.org/officeDocument/2006/relationships" xmlns:ac="http://schemas.microsoft.com/office/drawing/2013/main/command" xmlns:pc="http://schemas.microsoft.com/office/powerpoint/2013/main/command">
+  <pc:docChgLst>
+    <pc:chgData name="cagla celik" userId="S::ccelik@my.yearupunited.org::7b188b8e-7d7c-466a-bff8-d38aee0ad76d" providerId="AD" clId="Web-{24C6B49C-0DF2-AD68-7E52-A735D35FF8AD}"/>
+    <pc:docChg chg="modSld">
+      <pc:chgData name="cagla celik" userId="S::ccelik@my.yearupunited.org::7b188b8e-7d7c-466a-bff8-d38aee0ad76d" providerId="AD" clId="Web-{24C6B49C-0DF2-AD68-7E52-A735D35FF8AD}" dt="2026-04-30T23:58:42.080" v="42" actId="20577"/>
+      <pc:docMkLst>
+        <pc:docMk/>
+      </pc:docMkLst>
+      <pc:sldChg chg="addSp delSp modSp">
+        <pc:chgData name="cagla celik" userId="S::ccelik@my.yearupunited.org::7b188b8e-7d7c-466a-bff8-d38aee0ad76d" providerId="AD" clId="Web-{24C6B49C-0DF2-AD68-7E52-A735D35FF8AD}" dt="2026-04-30T23:58:42.080" v="42" actId="20577"/>
+        <pc:sldMkLst>
+          <pc:docMk/>
+          <pc:sldMk cId="0" sldId="257"/>
+        </pc:sldMkLst>
+        <pc:spChg chg="mod">
+          <ac:chgData name="cagla celik" userId="S::ccelik@my.yearupunited.org::7b188b8e-7d7c-466a-bff8-d38aee0ad76d" providerId="AD" clId="Web-{24C6B49C-0DF2-AD68-7E52-A735D35FF8AD}" dt="2026-04-30T23:54:22.157" v="24"/>
+          <ac:spMkLst>
+            <pc:docMk/>
+            <pc:sldMk cId="0" sldId="257"/>
+            <ac:spMk id="6" creationId="{00000000-0000-0000-0000-000000000000}"/>
+          </ac:spMkLst>
+        </pc:spChg>
+        <pc:spChg chg="mod">
+          <ac:chgData name="cagla celik" userId="S::ccelik@my.yearupunited.org::7b188b8e-7d7c-466a-bff8-d38aee0ad76d" providerId="AD" clId="Web-{24C6B49C-0DF2-AD68-7E52-A735D35FF8AD}" dt="2026-04-30T23:50:07.907" v="1" actId="1076"/>
+          <ac:spMkLst>
+            <pc:docMk/>
+            <pc:sldMk cId="0" sldId="257"/>
+            <ac:spMk id="7" creationId="{00000000-0000-0000-0000-000000000000}"/>
+          </ac:spMkLst>
+        </pc:spChg>
+        <pc:spChg chg="mod">
+          <ac:chgData name="cagla celik" userId="S::ccelik@my.yearupunited.org::7b188b8e-7d7c-466a-bff8-d38aee0ad76d" providerId="AD" clId="Web-{24C6B49C-0DF2-AD68-7E52-A735D35FF8AD}" dt="2026-04-30T23:50:13.907" v="2" actId="1076"/>
+          <ac:spMkLst>
+            <pc:docMk/>
+            <pc:sldMk cId="0" sldId="257"/>
+            <ac:spMk id="8" creationId="{00000000-0000-0000-0000-000000000000}"/>
+          </ac:spMkLst>
+        </pc:spChg>
+        <pc:spChg chg="mod">
+          <ac:chgData name="cagla celik" userId="S::ccelik@my.yearupunited.org::7b188b8e-7d7c-466a-bff8-d38aee0ad76d" providerId="AD" clId="Web-{24C6B49C-0DF2-AD68-7E52-A735D35FF8AD}" dt="2026-04-30T23:54:32.392" v="26"/>
+          <ac:spMkLst>
+            <pc:docMk/>
+            <pc:sldMk cId="0" sldId="257"/>
+            <ac:spMk id="9" creationId="{00000000-0000-0000-0000-000000000000}"/>
+          </ac:spMkLst>
+        </pc:spChg>
+        <pc:spChg chg="mod">
+          <ac:chgData name="cagla celik" userId="S::ccelik@my.yearupunited.org::7b188b8e-7d7c-466a-bff8-d38aee0ad76d" providerId="AD" clId="Web-{24C6B49C-0DF2-AD68-7E52-A735D35FF8AD}" dt="2026-04-30T23:50:39.735" v="5" actId="1076"/>
+          <ac:spMkLst>
+            <pc:docMk/>
+            <pc:sldMk cId="0" sldId="257"/>
+            <ac:spMk id="10" creationId="{00000000-0000-0000-0000-000000000000}"/>
+          </ac:spMkLst>
+        </pc:spChg>
+        <pc:spChg chg="mod">
+          <ac:chgData name="cagla celik" userId="S::ccelik@my.yearupunited.org::7b188b8e-7d7c-466a-bff8-d38aee0ad76d" providerId="AD" clId="Web-{24C6B49C-0DF2-AD68-7E52-A735D35FF8AD}" dt="2026-04-30T23:50:52.001" v="6" actId="1076"/>
+          <ac:spMkLst>
+            <pc:docMk/>
+            <pc:sldMk cId="0" sldId="257"/>
+            <ac:spMk id="11" creationId="{00000000-0000-0000-0000-000000000000}"/>
+          </ac:spMkLst>
+        </pc:spChg>
+        <pc:spChg chg="mod">
+          <ac:chgData name="cagla celik" userId="S::ccelik@my.yearupunited.org::7b188b8e-7d7c-466a-bff8-d38aee0ad76d" providerId="AD" clId="Web-{24C6B49C-0DF2-AD68-7E52-A735D35FF8AD}" dt="2026-04-30T23:54:39.142" v="28"/>
+          <ac:spMkLst>
+            <pc:docMk/>
+            <pc:sldMk cId="0" sldId="257"/>
+            <ac:spMk id="12" creationId="{00000000-0000-0000-0000-000000000000}"/>
+          </ac:spMkLst>
+        </pc:spChg>
+        <pc:spChg chg="mod">
+          <ac:chgData name="cagla celik" userId="S::ccelik@my.yearupunited.org::7b188b8e-7d7c-466a-bff8-d38aee0ad76d" providerId="AD" clId="Web-{24C6B49C-0DF2-AD68-7E52-A735D35FF8AD}" dt="2026-04-30T23:51:03.985" v="8" actId="1076"/>
+          <ac:spMkLst>
+            <pc:docMk/>
+            <pc:sldMk cId="0" sldId="257"/>
+            <ac:spMk id="13" creationId="{00000000-0000-0000-0000-000000000000}"/>
+          </ac:spMkLst>
+        </pc:spChg>
+        <pc:spChg chg="mod">
+          <ac:chgData name="cagla celik" userId="S::ccelik@my.yearupunited.org::7b188b8e-7d7c-466a-bff8-d38aee0ad76d" providerId="AD" clId="Web-{24C6B49C-0DF2-AD68-7E52-A735D35FF8AD}" dt="2026-04-30T23:51:10.704" v="9" actId="1076"/>
+          <ac:spMkLst>
+            <pc:docMk/>
+            <pc:sldMk cId="0" sldId="257"/>
+            <ac:spMk id="14" creationId="{00000000-0000-0000-0000-000000000000}"/>
+          </ac:spMkLst>
+        </pc:spChg>
+        <pc:spChg chg="del mod">
+          <ac:chgData name="cagla celik" userId="S::ccelik@my.yearupunited.org::7b188b8e-7d7c-466a-bff8-d38aee0ad76d" providerId="AD" clId="Web-{24C6B49C-0DF2-AD68-7E52-A735D35FF8AD}" dt="2026-04-30T23:52:27.985" v="13"/>
+          <ac:spMkLst>
+            <pc:docMk/>
+            <pc:sldMk cId="0" sldId="257"/>
+            <ac:spMk id="15" creationId="{829F8757-7D99-5A3C-AAB1-8DB06A8DD0A3}"/>
+          </ac:spMkLst>
+        </pc:spChg>
+        <pc:spChg chg="add del">
+          <ac:chgData name="cagla celik" userId="S::ccelik@my.yearupunited.org::7b188b8e-7d7c-466a-bff8-d38aee0ad76d" providerId="AD" clId="Web-{24C6B49C-0DF2-AD68-7E52-A735D35FF8AD}" dt="2026-04-30T23:52:58.876" v="15"/>
+          <ac:spMkLst>
+            <pc:docMk/>
+            <pc:sldMk cId="0" sldId="257"/>
+            <ac:spMk id="16" creationId="{7AFF9AEF-9FA9-9A7D-53BE-1AC599396AF5}"/>
+          </ac:spMkLst>
+        </pc:spChg>
+        <pc:spChg chg="add del">
+          <ac:chgData name="cagla celik" userId="S::ccelik@my.yearupunited.org::7b188b8e-7d7c-466a-bff8-d38aee0ad76d" providerId="AD" clId="Web-{24C6B49C-0DF2-AD68-7E52-A735D35FF8AD}" dt="2026-04-30T23:53:28.657" v="17"/>
+          <ac:spMkLst>
+            <pc:docMk/>
+            <pc:sldMk cId="0" sldId="257"/>
+            <ac:spMk id="17" creationId="{55EFFD4A-2843-9451-2E71-CEA5946AB1AE}"/>
+          </ac:spMkLst>
+        </pc:spChg>
+        <pc:spChg chg="add mod">
+          <ac:chgData name="cagla celik" userId="S::ccelik@my.yearupunited.org::7b188b8e-7d7c-466a-bff8-d38aee0ad76d" providerId="AD" clId="Web-{24C6B49C-0DF2-AD68-7E52-A735D35FF8AD}" dt="2026-04-30T23:58:42.080" v="42" actId="20577"/>
+          <ac:spMkLst>
+            <pc:docMk/>
+            <pc:sldMk cId="0" sldId="257"/>
+            <ac:spMk id="18" creationId="{003BE4A0-FF3F-5F48-2516-899317511A27}"/>
+          </ac:spMkLst>
+        </pc:spChg>
+      </pc:sldChg>
+    </pc:docChg>
+  </pc:docChgLst>
   <pc:docChgLst>
     <pc:chgData name="cagla celik" userId="S::ccelik@my.yearupunited.org::7b188b8e-7d7c-466a-bff8-d38aee0ad76d" providerId="AD" clId="Web-{F5547684-77FA-BCFE-9AE9-CC206A12FDD5}"/>
     <pc:docChg chg="addSld delSld modSld">
@@ -675,6 +797,68 @@
             <ac:spMk id="3" creationId="{00000000-0000-0000-0000-000000000000}"/>
           </ac:spMkLst>
         </pc:spChg>
+      </pc:sldChg>
+    </pc:docChg>
+  </pc:docChgLst>
+  <pc:docChgLst>
+    <pc:chgData name="cagla celik" userId="S::ccelik@my.yearupunited.org::7b188b8e-7d7c-466a-bff8-d38aee0ad76d" providerId="AD" clId="Web-{D7070056-2883-7A2A-92E5-C1BB82E89651}"/>
+    <pc:docChg chg="addSld delSld modSld">
+      <pc:chgData name="cagla celik" userId="S::ccelik@my.yearupunited.org::7b188b8e-7d7c-466a-bff8-d38aee0ad76d" providerId="AD" clId="Web-{D7070056-2883-7A2A-92E5-C1BB82E89651}" dt="2026-04-30T16:44:21.548" v="18" actId="20577"/>
+      <pc:docMkLst>
+        <pc:docMk/>
+      </pc:docMkLst>
+      <pc:sldChg chg="modSp">
+        <pc:chgData name="cagla celik" userId="S::ccelik@my.yearupunited.org::7b188b8e-7d7c-466a-bff8-d38aee0ad76d" providerId="AD" clId="Web-{D7070056-2883-7A2A-92E5-C1BB82E89651}" dt="2026-04-30T16:24:09.101" v="2" actId="20577"/>
+        <pc:sldMkLst>
+          <pc:docMk/>
+          <pc:sldMk cId="0" sldId="259"/>
+        </pc:sldMkLst>
+        <pc:spChg chg="mod">
+          <ac:chgData name="cagla celik" userId="S::ccelik@my.yearupunited.org::7b188b8e-7d7c-466a-bff8-d38aee0ad76d" providerId="AD" clId="Web-{D7070056-2883-7A2A-92E5-C1BB82E89651}" dt="2026-04-30T16:24:09.101" v="2" actId="20577"/>
+          <ac:spMkLst>
+            <pc:docMk/>
+            <pc:sldMk cId="0" sldId="259"/>
+            <ac:spMk id="4" creationId="{00000000-0000-0000-0000-000000000000}"/>
+          </ac:spMkLst>
+        </pc:spChg>
+      </pc:sldChg>
+      <pc:sldChg chg="del">
+        <pc:chgData name="cagla celik" userId="S::ccelik@my.yearupunited.org::7b188b8e-7d7c-466a-bff8-d38aee0ad76d" providerId="AD" clId="Web-{D7070056-2883-7A2A-92E5-C1BB82E89651}" dt="2026-04-30T16:23:52.303" v="0"/>
+        <pc:sldMkLst>
+          <pc:docMk/>
+          <pc:sldMk cId="1325269250" sldId="266"/>
+        </pc:sldMkLst>
+      </pc:sldChg>
+      <pc:sldChg chg="modSp add">
+        <pc:chgData name="cagla celik" userId="S::ccelik@my.yearupunited.org::7b188b8e-7d7c-466a-bff8-d38aee0ad76d" providerId="AD" clId="Web-{D7070056-2883-7A2A-92E5-C1BB82E89651}" dt="2026-04-30T16:44:21.548" v="18" actId="20577"/>
+        <pc:sldMkLst>
+          <pc:docMk/>
+          <pc:sldMk cId="3572834558" sldId="266"/>
+        </pc:sldMkLst>
+        <pc:spChg chg="mod">
+          <ac:chgData name="cagla celik" userId="S::ccelik@my.yearupunited.org::7b188b8e-7d7c-466a-bff8-d38aee0ad76d" providerId="AD" clId="Web-{D7070056-2883-7A2A-92E5-C1BB82E89651}" dt="2026-04-30T16:44:21.548" v="18" actId="20577"/>
+          <ac:spMkLst>
+            <pc:docMk/>
+            <pc:sldMk cId="3572834558" sldId="266"/>
+            <ac:spMk id="3" creationId="{00000000-0000-0000-0000-000000000000}"/>
+          </ac:spMkLst>
+        </pc:spChg>
+        <pc:spChg chg="mod">
+          <ac:chgData name="cagla celik" userId="S::ccelik@my.yearupunited.org::7b188b8e-7d7c-466a-bff8-d38aee0ad76d" providerId="AD" clId="Web-{D7070056-2883-7A2A-92E5-C1BB82E89651}" dt="2026-04-30T16:24:51.962" v="12" actId="1076"/>
+          <ac:spMkLst>
+            <pc:docMk/>
+            <pc:sldMk cId="3572834558" sldId="266"/>
+            <ac:spMk id="4" creationId="{00000000-0000-0000-0000-000000000000}"/>
+          </ac:spMkLst>
+        </pc:spChg>
+        <pc:picChg chg="mod">
+          <ac:chgData name="cagla celik" userId="S::ccelik@my.yearupunited.org::7b188b8e-7d7c-466a-bff8-d38aee0ad76d" providerId="AD" clId="Web-{D7070056-2883-7A2A-92E5-C1BB82E89651}" dt="2026-04-30T16:24:59.932" v="14" actId="1076"/>
+          <ac:picMkLst>
+            <pc:docMk/>
+            <pc:sldMk cId="3572834558" sldId="266"/>
+            <ac:picMk id="7" creationId="{3E305FB7-C8BE-BC8F-2D81-724F50C27F83}"/>
+          </ac:picMkLst>
+        </pc:picChg>
       </pc:sldChg>
     </pc:docChg>
   </pc:docChgLst>
@@ -762,7 +946,7 @@
           </a:lstStyle>
           <a:p>
             <a:fld id="{C623A06F-E81C-42B2-A080-D60DC9A7E451}" type="datetimeFigureOut">
-              <a:t>4/29/2026</a:t>
+              <a:t>4/30/2026</a:t>
             </a:fld>
             <a:endParaRPr lang="en-US"/>
           </a:p>
@@ -2570,7 +2754,7 @@
         </p:nvSpPr>
         <p:spPr>
           <a:xfrm>
-            <a:off x="275213" y="1970246"/>
+            <a:off x="275213" y="1325477"/>
             <a:ext cx="2560320" cy="1005840"/>
           </a:xfrm>
           <a:prstGeom prst="rect">
@@ -2581,7 +2765,10 @@
           </a:solidFill>
           <a:ln w="12700">
             <a:solidFill>
-              <a:srgbClr val="C9960C"/>
+              <a:schemeClr val="tx1">
+                <a:lumMod val="95000"/>
+                <a:lumOff val="5000"/>
+              </a:schemeClr>
             </a:solidFill>
             <a:prstDash val="solid"/>
           </a:ln>
@@ -2595,7 +2782,7 @@
         </p:nvSpPr>
         <p:spPr>
           <a:xfrm>
-            <a:off x="275213" y="1913275"/>
+            <a:off x="275213" y="1378410"/>
             <a:ext cx="2560320" cy="594360"/>
           </a:xfrm>
           <a:prstGeom prst="rect">
@@ -2631,7 +2818,7 @@
         </p:nvSpPr>
         <p:spPr>
           <a:xfrm>
-            <a:off x="275213" y="2507207"/>
+            <a:off x="201944" y="1825803"/>
             <a:ext cx="2560320" cy="445698"/>
           </a:xfrm>
           <a:prstGeom prst="rect">
@@ -2666,7 +2853,7 @@
         </p:nvSpPr>
         <p:spPr>
           <a:xfrm>
-            <a:off x="3110389" y="1973461"/>
+            <a:off x="3110389" y="1321364"/>
             <a:ext cx="2560320" cy="1005840"/>
           </a:xfrm>
           <a:prstGeom prst="rect">
@@ -2677,7 +2864,10 @@
           </a:solidFill>
           <a:ln w="12700">
             <a:solidFill>
-              <a:srgbClr val="1A7A4A"/>
+              <a:schemeClr val="tx1">
+                <a:lumMod val="95000"/>
+                <a:lumOff val="5000"/>
+              </a:schemeClr>
             </a:solidFill>
             <a:prstDash val="solid"/>
           </a:ln>
@@ -2691,7 +2881,7 @@
         </p:nvSpPr>
         <p:spPr>
           <a:xfrm>
-            <a:off x="3034486" y="1912025"/>
+            <a:off x="3034486" y="1377160"/>
             <a:ext cx="2560320" cy="594360"/>
           </a:xfrm>
           <a:prstGeom prst="rect">
@@ -2731,7 +2921,7 @@
         </p:nvSpPr>
         <p:spPr>
           <a:xfrm>
-            <a:off x="3034487" y="2372010"/>
+            <a:off x="2997852" y="1690606"/>
             <a:ext cx="2636222" cy="713589"/>
           </a:xfrm>
           <a:prstGeom prst="rect">
@@ -2767,7 +2957,7 @@
         </p:nvSpPr>
         <p:spPr>
           <a:xfrm>
-            <a:off x="5950029" y="1972211"/>
+            <a:off x="5950029" y="1320115"/>
             <a:ext cx="2560320" cy="1005840"/>
           </a:xfrm>
           <a:prstGeom prst="rect">
@@ -2778,7 +2968,10 @@
           </a:solidFill>
           <a:ln w="12700">
             <a:solidFill>
-              <a:srgbClr val="1B4F8A"/>
+              <a:schemeClr val="tx1">
+                <a:lumMod val="95000"/>
+                <a:lumOff val="5000"/>
+              </a:schemeClr>
             </a:solidFill>
             <a:prstDash val="solid"/>
           </a:ln>
@@ -2792,7 +2985,7 @@
         </p:nvSpPr>
         <p:spPr>
           <a:xfrm>
-            <a:off x="5869662" y="1915239"/>
+            <a:off x="5884316" y="1387701"/>
             <a:ext cx="2560320" cy="594360"/>
           </a:xfrm>
           <a:prstGeom prst="rect">
@@ -2832,7 +3025,7 @@
         </p:nvSpPr>
         <p:spPr>
           <a:xfrm>
-            <a:off x="5950029" y="2397550"/>
+            <a:off x="5950029" y="1745454"/>
             <a:ext cx="2560320" cy="660011"/>
           </a:xfrm>
           <a:prstGeom prst="rect">
@@ -2870,59 +3063,88 @@
       </p:sp>
       <p:sp>
         <p:nvSpPr>
-          <p:cNvPr id="15" name="TextBox 14">
+          <p:cNvPr id="18" name="Rectangle 17">
             <a:extLst>
               <a:ext uri="{FF2B5EF4-FFF2-40B4-BE49-F238E27FC236}">
-                <a16:creationId xmlns:a16="http://schemas.microsoft.com/office/drawing/2014/main" id="{829F8757-7D99-5A3C-AAB1-8DB06A8DD0A3}"/>
+                <a16:creationId xmlns:a16="http://schemas.microsoft.com/office/drawing/2014/main" id="{003BE4A0-FF3F-5F48-2516-899317511A27}"/>
               </a:ext>
             </a:extLst>
           </p:cNvPr>
-          <p:cNvSpPr txBox="1"/>
-          <p:nvPr/>
-        </p:nvSpPr>
-        <p:spPr>
-          <a:xfrm>
-            <a:off x="634008" y="3375422"/>
-            <a:ext cx="7724179" cy="1569660"/>
-          </a:xfrm>
-          <a:prstGeom prst="rect">
-            <a:avLst/>
-          </a:prstGeom>
+          <p:cNvSpPr/>
+          <p:nvPr/>
+        </p:nvSpPr>
+        <p:spPr>
+          <a:xfrm>
+            <a:off x="1067098" y="2991445"/>
+            <a:ext cx="7009804" cy="1285875"/>
+          </a:xfrm>
+          <a:prstGeom prst="rect">
+            <a:avLst/>
+          </a:prstGeom>
+          <a:solidFill>
+            <a:srgbClr val="C03729"/>
+          </a:solidFill>
+          <a:ln w="12700">
+            <a:solidFill>
+              <a:schemeClr val="tx1">
+                <a:lumMod val="95000"/>
+                <a:lumOff val="5000"/>
+              </a:schemeClr>
+            </a:solidFill>
+          </a:ln>
         </p:spPr>
         <p:style>
-          <a:lnRef idx="1">
-            <a:schemeClr val="accent5"/>
+          <a:lnRef idx="2">
+            <a:schemeClr val="accent1">
+              <a:shade val="15000"/>
+            </a:schemeClr>
           </a:lnRef>
-          <a:fillRef idx="2">
-            <a:schemeClr val="accent5"/>
+          <a:fillRef idx="1">
+            <a:schemeClr val="accent1"/>
           </a:fillRef>
-          <a:effectRef idx="1">
-            <a:schemeClr val="accent5"/>
+          <a:effectRef idx="0">
+            <a:schemeClr val="accent1"/>
           </a:effectRef>
           <a:fontRef idx="minor">
-            <a:schemeClr val="dk1"/>
+            <a:schemeClr val="lt1"/>
           </a:fontRef>
         </p:style>
         <p:txBody>
-          <a:bodyPr rot="0" spcFirstLastPara="0" vertOverflow="overflow" horzOverflow="overflow" vert="horz" wrap="square" lIns="91440" tIns="45720" rIns="91440" bIns="45720" numCol="1" spcCol="0" rtlCol="0" fromWordArt="0" anchor="t" anchorCtr="0" forceAA="0" compatLnSpc="1">
-            <a:prstTxWarp prst="textNoShape">
-              <a:avLst/>
-            </a:prstTxWarp>
-            <a:spAutoFit/>
-          </a:bodyPr>
+          <a:bodyPr rtlCol="0" anchor="ctr"/>
           <a:lstStyle/>
           <a:p>
             <a:pPr algn="ctr"/>
             <a:r>
-              <a:rPr lang="en-US" sz="2400" b="1">
+              <a:rPr lang="en-US" sz="2000" b="1" dirty="0">
+                <a:solidFill>
+                  <a:schemeClr val="bg1"/>
+                </a:solidFill>
                 <a:latin typeface="Georgia"/>
-                <a:ea typeface="+mn-lt"/>
-                <a:cs typeface="+mn-lt"/>
               </a:rPr>
-              <a:t>To understand where Jim Beam is performing well, where revenue is weak, which markets may have growth potential, and what competitive risks exist.</a:t>
+              <a:t>To understand where Jim Beam is performing well, where revenue is weak, which markets may have growth potential, and </a:t>
             </a:r>
-            <a:endParaRPr lang="en-US" sz="2400" b="1">
-              <a:latin typeface="Georgia"/>
+            <a:r>
+              <a:rPr lang="en-US" sz="2000" b="1">
+                <a:solidFill>
+                  <a:schemeClr val="bg1"/>
+                </a:solidFill>
+                <a:latin typeface="Georgia"/>
+              </a:rPr>
+              <a:t>what competitive</a:t>
+            </a:r>
+            <a:r>
+              <a:rPr lang="en-US" sz="2000" b="1" dirty="0">
+                <a:solidFill>
+                  <a:schemeClr val="bg1"/>
+                </a:solidFill>
+                <a:latin typeface="Georgia"/>
+              </a:rPr>
+              <a:t> risks exist.</a:t>
+            </a:r>
+            <a:endParaRPr lang="en-US" sz="2800" b="1" dirty="0">
+              <a:solidFill>
+                <a:schemeClr val="bg1"/>
+              </a:solidFill>
               <a:ea typeface="Calibri" panose="020F0502020204030204"/>
               <a:cs typeface="Calibri" panose="020F0502020204030204"/>
             </a:endParaRPr>
@@ -3651,24 +3873,23 @@
           <a:ln/>
         </p:spPr>
         <p:txBody>
-          <a:bodyPr wrap="square" rtlCol="0" anchor="ctr"/>
-          <a:lstStyle/>
-          <a:p>
-            <a:pPr marL="0" indent="0">
-              <a:buNone/>
-            </a:pPr>
+          <a:bodyPr wrap="square" lIns="91440" tIns="45720" rIns="91440" bIns="45720" rtlCol="0" anchor="ctr"/>
+          <a:lstStyle/>
+          <a:p>
             <a:r>
-              <a:rPr lang="en-US" sz="2200" b="1" dirty="0">
+              <a:rPr lang="en-US" sz="2200" b="1">
                 <a:solidFill>
                   <a:srgbClr val="1A1A2E"/>
                 </a:solidFill>
-                <a:latin typeface="Georgia" pitchFamily="34" charset="0"/>
+                <a:latin typeface="Georgia"/>
                 <a:ea typeface="Georgia" pitchFamily="34" charset="-122"/>
                 <a:cs typeface="Georgia" pitchFamily="34" charset="-120"/>
               </a:rPr>
-              <a:t>Top 5 Highest-Grossing Jim Beam Products</a:t>
+              <a:t>Top 5 Highest Grossing Jim Beam Products</a:t>
             </a:r>
-            <a:endParaRPr lang="en-US" sz="2200" dirty="0"/>
+            <a:endParaRPr lang="en-US" sz="2200">
+              <a:latin typeface="Georgia"/>
+            </a:endParaRPr>
           </a:p>
         </p:txBody>
       </p:sp>
@@ -3778,7 +3999,7 @@
 
 <file path=ppt/slides/slide5.xml><?xml version="1.0" encoding="utf-8"?>
 <p:sld xmlns:a="http://schemas.openxmlformats.org/drawingml/2006/main" xmlns:r="http://schemas.openxmlformats.org/officeDocument/2006/relationships" xmlns:p="http://schemas.openxmlformats.org/presentationml/2006/main">
-  <p:cSld name="Slide 5">
+  <p:cSld name="Slide 7">
     <p:bg>
       <p:bgPr>
         <a:solidFill>
@@ -3853,103 +4074,19 @@
                   <a:srgbClr val="FFFFFF"/>
                 </a:solidFill>
               </a:rPr>
-              <a:t>WEAKNESS   |  Geographic Dead Zones</a:t>
+              <a:t>WEAKNESS | Weak &amp; Inconsistent County Performan</a:t>
             </a:r>
-            <a:endParaRPr lang="en-US" sz="1300"/>
-          </a:p>
-        </p:txBody>
-      </p:sp>
-      <p:sp>
-        <p:nvSpPr>
-          <p:cNvPr id="4" name="Text 2"/>
-          <p:cNvSpPr/>
-          <p:nvPr/>
-        </p:nvSpPr>
-        <p:spPr>
-          <a:xfrm>
-            <a:off x="1786" y="506135"/>
-            <a:ext cx="8229600" cy="502920"/>
-          </a:xfrm>
-          <a:prstGeom prst="rect">
-            <a:avLst/>
-          </a:prstGeom>
-          <a:noFill/>
-          <a:ln/>
-        </p:spPr>
-        <p:txBody>
-          <a:bodyPr wrap="square" rtlCol="0" anchor="ctr"/>
-          <a:lstStyle/>
-          <a:p>
-            <a:pPr marL="0" indent="0">
-              <a:buNone/>
-            </a:pPr>
             <a:r>
-              <a:rPr lang="en-US" sz="2200" b="1" dirty="0">
+              <a:rPr lang="en-US" sz="1300" b="1" dirty="0">
                 <a:solidFill>
-                  <a:srgbClr val="1A1A2E"/>
+                  <a:srgbClr val="FFFFFF"/>
                 </a:solidFill>
-                <a:latin typeface="Georgia" pitchFamily="34" charset="0"/>
-                <a:ea typeface="Georgia" pitchFamily="34" charset="-122"/>
-                <a:cs typeface="Georgia" pitchFamily="34" charset="-120"/>
               </a:rPr>
-              <a:t>Jim Beam's 5 Lowest-Performing Counties</a:t>
+              <a:t>ce</a:t>
             </a:r>
-            <a:endParaRPr lang="en-US" sz="2200" dirty="0"/>
-          </a:p>
-        </p:txBody>
-      </p:sp>
-      <p:pic>
-        <p:nvPicPr>
-          <p:cNvPr id="5" name="Image 0"/>
-          <p:cNvPicPr>
-            <a:picLocks noChangeAspect="1"/>
-          </p:cNvPicPr>
-          <p:nvPr/>
-        </p:nvPicPr>
-        <p:blipFill>
-          <a:blip r:embed="rId3"/>
-          <a:srcRect t="5368" b="-105"/>
-          <a:stretch>
-            <a:fillRect/>
-          </a:stretch>
-        </p:blipFill>
-        <p:spPr>
-          <a:xfrm>
-            <a:off x="158224" y="983880"/>
-            <a:ext cx="8528576" cy="3836606"/>
-          </a:xfrm>
-          <a:prstGeom prst="rect">
-            <a:avLst/>
-          </a:prstGeom>
-        </p:spPr>
-      </p:pic>
-      <p:sp>
-        <p:nvSpPr>
-          <p:cNvPr id="7" name="Text 4"/>
-          <p:cNvSpPr/>
-          <p:nvPr/>
-        </p:nvSpPr>
-        <p:spPr>
-          <a:xfrm>
-            <a:off x="6400800" y="1371600"/>
-            <a:ext cx="2286000" cy="365760"/>
-          </a:xfrm>
-          <a:prstGeom prst="rect">
-            <a:avLst/>
-          </a:prstGeom>
-          <a:noFill/>
-          <a:ln/>
-        </p:spPr>
-        <p:txBody>
-          <a:bodyPr wrap="square" lIns="91440" tIns="45720" rIns="91440" bIns="45720" rtlCol="0" anchor="ctr"/>
-          <a:lstStyle/>
-          <a:p>
-            <a:pPr marL="0" indent="0">
-              <a:buNone/>
-            </a:pPr>
-            <a:endParaRPr lang="en-US" sz="1200" b="1" dirty="0">
+            <a:endParaRPr lang="en-US" sz="1300" b="1" dirty="0">
               <a:solidFill>
-                <a:srgbClr val="C0392B"/>
+                <a:srgbClr val="FFFFFF"/>
               </a:solidFill>
               <a:ea typeface="Calibri"/>
               <a:cs typeface="Calibri"/>
@@ -3959,14 +4096,50 @@
       </p:sp>
       <p:sp>
         <p:nvSpPr>
+          <p:cNvPr id="4" name="Text 2"/>
+          <p:cNvSpPr/>
+          <p:nvPr/>
+        </p:nvSpPr>
+        <p:spPr>
+          <a:xfrm>
+            <a:off x="1786" y="383271"/>
+            <a:ext cx="8229600" cy="502920"/>
+          </a:xfrm>
+          <a:prstGeom prst="rect">
+            <a:avLst/>
+          </a:prstGeom>
+          <a:noFill/>
+          <a:ln/>
+        </p:spPr>
+        <p:txBody>
+          <a:bodyPr wrap="square" lIns="91440" tIns="45720" rIns="91440" bIns="45720" rtlCol="0" anchor="ctr"/>
+          <a:lstStyle/>
+          <a:p>
+            <a:r>
+              <a:rPr lang="en-US" sz="2000" b="1">
+                <a:solidFill>
+                  <a:srgbClr val="1A1A2E"/>
+                </a:solidFill>
+                <a:latin typeface="Georgia"/>
+                <a:ea typeface="+mn-lt"/>
+                <a:cs typeface="+mn-lt"/>
+              </a:rPr>
+              <a:t>Monthly Revenue Trend: Fremont vs. Polk (2014)</a:t>
+            </a:r>
+            <a:endParaRPr lang="en-US" sz="2000"/>
+          </a:p>
+        </p:txBody>
+      </p:sp>
+      <p:sp>
+        <p:nvSpPr>
           <p:cNvPr id="8" name="Text 5"/>
           <p:cNvSpPr/>
           <p:nvPr/>
         </p:nvSpPr>
         <p:spPr>
           <a:xfrm>
-            <a:off x="6400800" y="1783080"/>
-            <a:ext cx="2377440" cy="2743200"/>
+            <a:off x="6446520" y="1737360"/>
+            <a:ext cx="2377440" cy="2834640"/>
           </a:xfrm>
           <a:prstGeom prst="rect">
             <a:avLst/>
@@ -3994,68 +4167,58 @@
           </a:p>
         </p:txBody>
       </p:sp>
-      <p:sp>
-        <p:nvSpPr>
-          <p:cNvPr id="6" name="Rectangle 5">
+      <p:pic>
+        <p:nvPicPr>
+          <p:cNvPr id="7" name="Picture 6" descr="A graph with a line going up&#10;&#10;AI-generated content may be incorrect.">
             <a:extLst>
               <a:ext uri="{FF2B5EF4-FFF2-40B4-BE49-F238E27FC236}">
-                <a16:creationId xmlns:a16="http://schemas.microsoft.com/office/drawing/2014/main" id="{C3A6E355-A581-67BB-272A-64318AA8903F}"/>
+                <a16:creationId xmlns:a16="http://schemas.microsoft.com/office/drawing/2014/main" id="{3E305FB7-C8BE-BC8F-2D81-724F50C27F83}"/>
               </a:ext>
             </a:extLst>
           </p:cNvPr>
-          <p:cNvSpPr/>
-          <p:nvPr/>
-        </p:nvSpPr>
-        <p:spPr>
-          <a:xfrm>
-            <a:off x="8116260" y="2362840"/>
-            <a:ext cx="566697" cy="1075764"/>
-          </a:xfrm>
-          <a:prstGeom prst="rect">
-            <a:avLst/>
-          </a:prstGeom>
-          <a:solidFill>
-            <a:srgbClr val="FC9805"/>
-          </a:solidFill>
-          <a:ln>
-            <a:noFill/>
-          </a:ln>
-        </p:spPr>
-        <p:style>
-          <a:lnRef idx="2">
-            <a:schemeClr val="accent1">
-              <a:shade val="15000"/>
-            </a:schemeClr>
-          </a:lnRef>
-          <a:fillRef idx="1">
-            <a:schemeClr val="accent1"/>
-          </a:fillRef>
-          <a:effectRef idx="0">
-            <a:schemeClr val="accent1"/>
-          </a:effectRef>
-          <a:fontRef idx="minor">
-            <a:schemeClr val="lt1"/>
-          </a:fontRef>
-        </p:style>
-        <p:txBody>
-          <a:bodyPr rtlCol="0" anchor="ctr"/>
-          <a:lstStyle/>
-          <a:p>
-            <a:pPr algn="ctr"/>
-            <a:endParaRPr lang="en-US"/>
-          </a:p>
-        </p:txBody>
-      </p:sp>
+          <p:cNvPicPr>
+            <a:picLocks noChangeAspect="1"/>
+          </p:cNvPicPr>
+          <p:nvPr/>
+        </p:nvPicPr>
+        <p:blipFill>
+          <a:blip r:embed="rId3"/>
+          <a:stretch>
+            <a:fillRect/>
+          </a:stretch>
+        </p:blipFill>
+        <p:spPr>
+          <a:xfrm>
+            <a:off x="781065" y="811091"/>
+            <a:ext cx="7582223" cy="4145720"/>
+          </a:xfrm>
+          <a:prstGeom prst="rect">
+            <a:avLst/>
+          </a:prstGeom>
+        </p:spPr>
+      </p:pic>
     </p:spTree>
     <p:extLst>
       <p:ext uri="{BB962C8B-B14F-4D97-AF65-F5344CB8AC3E}">
-        <p14:creationId xmlns:p14="http://schemas.microsoft.com/office/powerpoint/2010/main" val="1325269250"/>
+        <p14:creationId xmlns:p14="http://schemas.microsoft.com/office/powerpoint/2010/main" val="3572834558"/>
       </p:ext>
     </p:extLst>
   </p:cSld>
   <p:clrMapOvr>
     <a:masterClrMapping/>
   </p:clrMapOvr>
+  <mc:AlternateContent xmlns:mc="http://schemas.openxmlformats.org/markup-compatibility/2006" xmlns:p14="http://schemas.microsoft.com/office/powerpoint/2010/main">
+    <mc:Choice Requires="p14">
+      <p:transition spd="slow" p14:dur="1250">
+        <p14:switch dir="r"/>
+      </p:transition>
+    </mc:Choice>
+    <mc:Fallback xmlns="">
+      <p:transition spd="slow">
+        <p:fade/>
+      </p:transition>
+    </mc:Fallback>
+  </mc:AlternateContent>
 </p:sld>
 </file>
 
